--- a/sorting_algorithms/Quick Sort.pptx
+++ b/sorting_algorithms/Quick Sort.pptx
@@ -5,7 +5,7 @@
     <p:sldMasterId id="2147483648" r:id="rId4"/>
   </p:sldMasterIdLst>
   <p:notesMasterIdLst>
-    <p:notesMasterId r:id="rId23"/>
+    <p:notesMasterId r:id="rId24"/>
   </p:notesMasterIdLst>
   <p:sldIdLst>
     <p:sldId id="273" r:id="rId5"/>
@@ -26,6 +26,7 @@
     <p:sldId id="288" r:id="rId20"/>
     <p:sldId id="289" r:id="rId21"/>
     <p:sldId id="290" r:id="rId22"/>
+    <p:sldId id="291" r:id="rId23"/>
   </p:sldIdLst>
   <p:sldSz cx="12192000" cy="6858000"/>
   <p:notesSz cx="6858000" cy="9144000"/>
@@ -222,7 +223,7 @@
           <a:p>
             <a:fld id="{F666E1FD-E7A0-497B-BBC0-740BAAC97C64}" type="datetimeFigureOut">
               <a:rPr lang="en-PH" smtClean="0"/>
-              <a:t>06/07/2026</a:t>
+              <a:t>14/07/2026</a:t>
             </a:fld>
             <a:endParaRPr lang="en-PH"/>
           </a:p>
@@ -1330,6 +1331,114 @@
 </p:notes>
 </file>
 
+<file path=ppt/notesSlides/notesSlide19.xml><?xml version="1.0" encoding="utf-8"?>
+<p:notes xmlns:a="http://schemas.openxmlformats.org/drawingml/2006/main" xmlns:r="http://schemas.openxmlformats.org/officeDocument/2006/relationships" xmlns:p="http://schemas.openxmlformats.org/presentationml/2006/main">
+  <p:cSld>
+    <p:spTree>
+      <p:nvGrpSpPr>
+        <p:cNvPr id="1" name="">
+          <a:extLst>
+            <a:ext uri="{FF2B5EF4-FFF2-40B4-BE49-F238E27FC236}">
+              <a16:creationId xmlns:a16="http://schemas.microsoft.com/office/drawing/2014/main" id="{B0C334C7-0478-8D88-7EED-FD1876851CCB}"/>
+            </a:ext>
+          </a:extLst>
+        </p:cNvPr>
+        <p:cNvGrpSpPr/>
+        <p:nvPr/>
+      </p:nvGrpSpPr>
+      <p:grpSpPr>
+        <a:xfrm>
+          <a:off x="0" y="0"/>
+          <a:ext cx="0" cy="0"/>
+          <a:chOff x="0" y="0"/>
+          <a:chExt cx="0" cy="0"/>
+        </a:xfrm>
+      </p:grpSpPr>
+      <p:sp>
+        <p:nvSpPr>
+          <p:cNvPr id="2" name="Slide Image Placeholder 1">
+            <a:extLst>
+              <a:ext uri="{FF2B5EF4-FFF2-40B4-BE49-F238E27FC236}">
+                <a16:creationId xmlns:a16="http://schemas.microsoft.com/office/drawing/2014/main" id="{46CB8A13-AB69-7226-5291-491E7B4B1548}"/>
+              </a:ext>
+            </a:extLst>
+          </p:cNvPr>
+          <p:cNvSpPr>
+            <a:spLocks noGrp="1" noRot="1" noChangeAspect="1"/>
+          </p:cNvSpPr>
+          <p:nvPr>
+            <p:ph type="sldImg"/>
+          </p:nvPr>
+        </p:nvSpPr>
+        <p:spPr/>
+      </p:sp>
+      <p:sp>
+        <p:nvSpPr>
+          <p:cNvPr id="3" name="Notes Placeholder 2">
+            <a:extLst>
+              <a:ext uri="{FF2B5EF4-FFF2-40B4-BE49-F238E27FC236}">
+                <a16:creationId xmlns:a16="http://schemas.microsoft.com/office/drawing/2014/main" id="{D0353230-6980-75A8-61DD-51AB3BB7A1A8}"/>
+              </a:ext>
+            </a:extLst>
+          </p:cNvPr>
+          <p:cNvSpPr>
+            <a:spLocks noGrp="1"/>
+          </p:cNvSpPr>
+          <p:nvPr>
+            <p:ph type="body" idx="1"/>
+          </p:nvPr>
+        </p:nvSpPr>
+        <p:spPr/>
+        <p:txBody>
+          <a:bodyPr/>
+          <a:lstStyle/>
+          <a:p>
+            <a:endParaRPr lang="en-PH" dirty="0"/>
+          </a:p>
+        </p:txBody>
+      </p:sp>
+      <p:sp>
+        <p:nvSpPr>
+          <p:cNvPr id="4" name="Slide Number Placeholder 3">
+            <a:extLst>
+              <a:ext uri="{FF2B5EF4-FFF2-40B4-BE49-F238E27FC236}">
+                <a16:creationId xmlns:a16="http://schemas.microsoft.com/office/drawing/2014/main" id="{4F512727-9BC8-5F40-7A3A-1699841274FE}"/>
+              </a:ext>
+            </a:extLst>
+          </p:cNvPr>
+          <p:cNvSpPr>
+            <a:spLocks noGrp="1"/>
+          </p:cNvSpPr>
+          <p:nvPr>
+            <p:ph type="sldNum" sz="quarter" idx="5"/>
+          </p:nvPr>
+        </p:nvSpPr>
+        <p:spPr/>
+        <p:txBody>
+          <a:bodyPr/>
+          <a:lstStyle/>
+          <a:p>
+            <a:fld id="{FE90CCE9-4AAE-4E1F-85AD-521A406D6524}" type="slidenum">
+              <a:rPr lang="en-PH" smtClean="0"/>
+              <a:t>19</a:t>
+            </a:fld>
+            <a:endParaRPr lang="en-PH"/>
+          </a:p>
+        </p:txBody>
+      </p:sp>
+    </p:spTree>
+    <p:extLst>
+      <p:ext uri="{BB962C8B-B14F-4D97-AF65-F5344CB8AC3E}">
+        <p14:creationId xmlns:p14="http://schemas.microsoft.com/office/powerpoint/2010/main" val="3890476603"/>
+      </p:ext>
+    </p:extLst>
+  </p:cSld>
+  <p:clrMapOvr>
+    <a:masterClrMapping/>
+  </p:clrMapOvr>
+</p:notes>
+</file>
+
 <file path=ppt/notesSlides/notesSlide2.xml><?xml version="1.0" encoding="utf-8"?>
 <p:notes xmlns:a="http://schemas.openxmlformats.org/drawingml/2006/main" xmlns:r="http://schemas.openxmlformats.org/officeDocument/2006/relationships" xmlns:p="http://schemas.openxmlformats.org/presentationml/2006/main">
   <p:cSld>
@@ -2151,7 +2260,7 @@
           <a:p>
             <a:fld id="{0CCF0B81-6BD8-4C65-9459-815598C5F1F4}" type="datetimeFigureOut">
               <a:rPr lang="en-PH" smtClean="0"/>
-              <a:t>06/07/2026</a:t>
+              <a:t>14/07/2026</a:t>
             </a:fld>
             <a:endParaRPr lang="en-PH"/>
           </a:p>
@@ -2351,7 +2460,7 @@
           <a:p>
             <a:fld id="{0CCF0B81-6BD8-4C65-9459-815598C5F1F4}" type="datetimeFigureOut">
               <a:rPr lang="en-PH" smtClean="0"/>
-              <a:t>06/07/2026</a:t>
+              <a:t>14/07/2026</a:t>
             </a:fld>
             <a:endParaRPr lang="en-PH"/>
           </a:p>
@@ -2561,7 +2670,7 @@
           <a:p>
             <a:fld id="{0CCF0B81-6BD8-4C65-9459-815598C5F1F4}" type="datetimeFigureOut">
               <a:rPr lang="en-PH" smtClean="0"/>
-              <a:t>06/07/2026</a:t>
+              <a:t>14/07/2026</a:t>
             </a:fld>
             <a:endParaRPr lang="en-PH"/>
           </a:p>
@@ -2761,7 +2870,7 @@
           <a:p>
             <a:fld id="{0CCF0B81-6BD8-4C65-9459-815598C5F1F4}" type="datetimeFigureOut">
               <a:rPr lang="en-PH" smtClean="0"/>
-              <a:t>06/07/2026</a:t>
+              <a:t>14/07/2026</a:t>
             </a:fld>
             <a:endParaRPr lang="en-PH"/>
           </a:p>
@@ -3037,7 +3146,7 @@
           <a:p>
             <a:fld id="{0CCF0B81-6BD8-4C65-9459-815598C5F1F4}" type="datetimeFigureOut">
               <a:rPr lang="en-PH" smtClean="0"/>
-              <a:t>06/07/2026</a:t>
+              <a:t>14/07/2026</a:t>
             </a:fld>
             <a:endParaRPr lang="en-PH"/>
           </a:p>
@@ -3305,7 +3414,7 @@
           <a:p>
             <a:fld id="{0CCF0B81-6BD8-4C65-9459-815598C5F1F4}" type="datetimeFigureOut">
               <a:rPr lang="en-PH" smtClean="0"/>
-              <a:t>06/07/2026</a:t>
+              <a:t>14/07/2026</a:t>
             </a:fld>
             <a:endParaRPr lang="en-PH"/>
           </a:p>
@@ -3720,7 +3829,7 @@
           <a:p>
             <a:fld id="{0CCF0B81-6BD8-4C65-9459-815598C5F1F4}" type="datetimeFigureOut">
               <a:rPr lang="en-PH" smtClean="0"/>
-              <a:t>06/07/2026</a:t>
+              <a:t>14/07/2026</a:t>
             </a:fld>
             <a:endParaRPr lang="en-PH"/>
           </a:p>
@@ -3862,7 +3971,7 @@
           <a:p>
             <a:fld id="{0CCF0B81-6BD8-4C65-9459-815598C5F1F4}" type="datetimeFigureOut">
               <a:rPr lang="en-PH" smtClean="0"/>
-              <a:t>06/07/2026</a:t>
+              <a:t>14/07/2026</a:t>
             </a:fld>
             <a:endParaRPr lang="en-PH"/>
           </a:p>
@@ -3975,7 +4084,7 @@
           <a:p>
             <a:fld id="{0CCF0B81-6BD8-4C65-9459-815598C5F1F4}" type="datetimeFigureOut">
               <a:rPr lang="en-PH" smtClean="0"/>
-              <a:t>06/07/2026</a:t>
+              <a:t>14/07/2026</a:t>
             </a:fld>
             <a:endParaRPr lang="en-PH"/>
           </a:p>
@@ -4288,7 +4397,7 @@
           <a:p>
             <a:fld id="{0CCF0B81-6BD8-4C65-9459-815598C5F1F4}" type="datetimeFigureOut">
               <a:rPr lang="en-PH" smtClean="0"/>
-              <a:t>06/07/2026</a:t>
+              <a:t>14/07/2026</a:t>
             </a:fld>
             <a:endParaRPr lang="en-PH"/>
           </a:p>
@@ -4577,7 +4686,7 @@
           <a:p>
             <a:fld id="{0CCF0B81-6BD8-4C65-9459-815598C5F1F4}" type="datetimeFigureOut">
               <a:rPr lang="en-PH" smtClean="0"/>
-              <a:t>06/07/2026</a:t>
+              <a:t>14/07/2026</a:t>
             </a:fld>
             <a:endParaRPr lang="en-PH"/>
           </a:p>
@@ -4820,7 +4929,7 @@
           <a:p>
             <a:fld id="{0CCF0B81-6BD8-4C65-9459-815598C5F1F4}" type="datetimeFigureOut">
               <a:rPr lang="en-PH" smtClean="0"/>
-              <a:t>06/07/2026</a:t>
+              <a:t>14/07/2026</a:t>
             </a:fld>
             <a:endParaRPr lang="en-PH"/>
           </a:p>
@@ -11409,6 +11518,787 @@
     </p:tnLst>
     <p:bldLst>
       <p:bldP spid="12" grpId="0" animBg="1"/>
+    </p:bldLst>
+  </p:timing>
+</p:sld>
+</file>
+
+<file path=ppt/slides/slide19.xml><?xml version="1.0" encoding="utf-8"?>
+<p:sld xmlns:a="http://schemas.openxmlformats.org/drawingml/2006/main" xmlns:r="http://schemas.openxmlformats.org/officeDocument/2006/relationships" xmlns:p="http://schemas.openxmlformats.org/presentationml/2006/main">
+  <p:cSld>
+    <p:bg>
+      <p:bgPr>
+        <a:solidFill>
+          <a:schemeClr val="bg1"/>
+        </a:solidFill>
+        <a:effectLst/>
+      </p:bgPr>
+    </p:bg>
+    <p:spTree>
+      <p:nvGrpSpPr>
+        <p:cNvPr id="1" name="">
+          <a:extLst>
+            <a:ext uri="{FF2B5EF4-FFF2-40B4-BE49-F238E27FC236}">
+              <a16:creationId xmlns:a16="http://schemas.microsoft.com/office/drawing/2014/main" id="{2DA55D74-CD7F-946B-E3A2-A1CF8A1C05CD}"/>
+            </a:ext>
+          </a:extLst>
+        </p:cNvPr>
+        <p:cNvGrpSpPr/>
+        <p:nvPr/>
+      </p:nvGrpSpPr>
+      <p:grpSpPr>
+        <a:xfrm>
+          <a:off x="0" y="0"/>
+          <a:ext cx="0" cy="0"/>
+          <a:chOff x="0" y="0"/>
+          <a:chExt cx="0" cy="0"/>
+        </a:xfrm>
+      </p:grpSpPr>
+      <p:cxnSp>
+        <p:nvCxnSpPr>
+          <p:cNvPr id="11" name="Straight Arrow Connector 10">
+            <a:extLst>
+              <a:ext uri="{FF2B5EF4-FFF2-40B4-BE49-F238E27FC236}">
+                <a16:creationId xmlns:a16="http://schemas.microsoft.com/office/drawing/2014/main" id="{4048922D-EC09-2F50-7EF9-088F4169FFD1}"/>
+              </a:ext>
+            </a:extLst>
+          </p:cNvPr>
+          <p:cNvCxnSpPr/>
+          <p:nvPr/>
+        </p:nvCxnSpPr>
+        <p:spPr>
+          <a:xfrm>
+            <a:off x="1968500" y="5486400"/>
+            <a:ext cx="8020050" cy="0"/>
+          </a:xfrm>
+          <a:prstGeom prst="straightConnector1">
+            <a:avLst/>
+          </a:prstGeom>
+          <a:ln w="76200">
+            <a:solidFill>
+              <a:schemeClr val="bg2">
+                <a:lumMod val="90000"/>
+              </a:schemeClr>
+            </a:solidFill>
+            <a:tailEnd type="triangle"/>
+          </a:ln>
+        </p:spPr>
+        <p:style>
+          <a:lnRef idx="1">
+            <a:schemeClr val="accent1"/>
+          </a:lnRef>
+          <a:fillRef idx="0">
+            <a:schemeClr val="accent1"/>
+          </a:fillRef>
+          <a:effectRef idx="0">
+            <a:schemeClr val="accent1"/>
+          </a:effectRef>
+          <a:fontRef idx="minor">
+            <a:schemeClr val="tx1"/>
+          </a:fontRef>
+        </p:style>
+      </p:cxnSp>
+      <p:cxnSp>
+        <p:nvCxnSpPr>
+          <p:cNvPr id="17" name="Straight Arrow Connector 16">
+            <a:extLst>
+              <a:ext uri="{FF2B5EF4-FFF2-40B4-BE49-F238E27FC236}">
+                <a16:creationId xmlns:a16="http://schemas.microsoft.com/office/drawing/2014/main" id="{05506810-F2E6-B493-C4A5-48FB34577FB5}"/>
+              </a:ext>
+            </a:extLst>
+          </p:cNvPr>
+          <p:cNvCxnSpPr>
+            <a:cxnSpLocks/>
+          </p:cNvCxnSpPr>
+          <p:nvPr/>
+        </p:nvCxnSpPr>
+        <p:spPr>
+          <a:xfrm flipV="1">
+            <a:off x="1968500" y="327025"/>
+            <a:ext cx="0" cy="5197475"/>
+          </a:xfrm>
+          <a:prstGeom prst="straightConnector1">
+            <a:avLst/>
+          </a:prstGeom>
+          <a:ln w="76200">
+            <a:solidFill>
+              <a:schemeClr val="bg2">
+                <a:lumMod val="90000"/>
+              </a:schemeClr>
+            </a:solidFill>
+            <a:tailEnd type="triangle"/>
+          </a:ln>
+        </p:spPr>
+        <p:style>
+          <a:lnRef idx="1">
+            <a:schemeClr val="accent1"/>
+          </a:lnRef>
+          <a:fillRef idx="0">
+            <a:schemeClr val="accent1"/>
+          </a:fillRef>
+          <a:effectRef idx="0">
+            <a:schemeClr val="accent1"/>
+          </a:effectRef>
+          <a:fontRef idx="minor">
+            <a:schemeClr val="tx1"/>
+          </a:fontRef>
+        </p:style>
+      </p:cxnSp>
+      <p:sp>
+        <p:nvSpPr>
+          <p:cNvPr id="18" name="TextBox 17">
+            <a:extLst>
+              <a:ext uri="{FF2B5EF4-FFF2-40B4-BE49-F238E27FC236}">
+                <a16:creationId xmlns:a16="http://schemas.microsoft.com/office/drawing/2014/main" id="{A1723FA8-BF8C-E8DA-0474-7B5AE4E8DC39}"/>
+              </a:ext>
+            </a:extLst>
+          </p:cNvPr>
+          <p:cNvSpPr txBox="1"/>
+          <p:nvPr/>
+        </p:nvSpPr>
+        <p:spPr>
+          <a:xfrm>
+            <a:off x="5321935" y="5652964"/>
+            <a:ext cx="1313180" cy="707886"/>
+          </a:xfrm>
+          <a:prstGeom prst="rect">
+            <a:avLst/>
+          </a:prstGeom>
+          <a:noFill/>
+        </p:spPr>
+        <p:txBody>
+          <a:bodyPr wrap="none" rtlCol="0">
+            <a:spAutoFit/>
+          </a:bodyPr>
+          <a:lstStyle/>
+          <a:p>
+            <a:r>
+              <a:rPr lang="en-PH" sz="4000" b="1" dirty="0">
+                <a:latin typeface="Consolas" panose="020B0609020204030204" pitchFamily="49" charset="0"/>
+              </a:rPr>
+              <a:t>data</a:t>
+            </a:r>
+          </a:p>
+        </p:txBody>
+      </p:sp>
+      <p:sp>
+        <p:nvSpPr>
+          <p:cNvPr id="19" name="TextBox 18">
+            <a:extLst>
+              <a:ext uri="{FF2B5EF4-FFF2-40B4-BE49-F238E27FC236}">
+                <a16:creationId xmlns:a16="http://schemas.microsoft.com/office/drawing/2014/main" id="{AEC364D3-F350-B33C-A78A-F7E6F4AF9FF1}"/>
+              </a:ext>
+            </a:extLst>
+          </p:cNvPr>
+          <p:cNvSpPr txBox="1"/>
+          <p:nvPr/>
+        </p:nvSpPr>
+        <p:spPr>
+          <a:xfrm rot="5400000" flipH="1">
+            <a:off x="513467" y="2571819"/>
+            <a:ext cx="1313180" cy="707886"/>
+          </a:xfrm>
+          <a:prstGeom prst="rect">
+            <a:avLst/>
+          </a:prstGeom>
+          <a:noFill/>
+        </p:spPr>
+        <p:txBody>
+          <a:bodyPr wrap="none" rtlCol="0">
+            <a:spAutoFit/>
+          </a:bodyPr>
+          <a:lstStyle/>
+          <a:p>
+            <a:r>
+              <a:rPr lang="en-PH" sz="4000" b="1" dirty="0">
+                <a:latin typeface="Consolas" panose="020B0609020204030204" pitchFamily="49" charset="0"/>
+              </a:rPr>
+              <a:t>time</a:t>
+            </a:r>
+          </a:p>
+        </p:txBody>
+      </p:sp>
+      <p:cxnSp>
+        <p:nvCxnSpPr>
+          <p:cNvPr id="20" name="Straight Arrow Connector 19">
+            <a:extLst>
+              <a:ext uri="{FF2B5EF4-FFF2-40B4-BE49-F238E27FC236}">
+                <a16:creationId xmlns:a16="http://schemas.microsoft.com/office/drawing/2014/main" id="{F875AFF1-00E2-4A3D-0781-FC3925989963}"/>
+              </a:ext>
+            </a:extLst>
+          </p:cNvPr>
+          <p:cNvCxnSpPr>
+            <a:cxnSpLocks/>
+          </p:cNvCxnSpPr>
+          <p:nvPr/>
+        </p:nvCxnSpPr>
+        <p:spPr>
+          <a:xfrm flipV="1">
+            <a:off x="1968500" y="2125981"/>
+            <a:ext cx="5925820" cy="3322320"/>
+          </a:xfrm>
+          <a:prstGeom prst="straightConnector1">
+            <a:avLst/>
+          </a:prstGeom>
+          <a:ln w="76200">
+            <a:solidFill>
+              <a:srgbClr val="FFFF00"/>
+            </a:solidFill>
+            <a:tailEnd type="none"/>
+          </a:ln>
+        </p:spPr>
+        <p:style>
+          <a:lnRef idx="1">
+            <a:schemeClr val="accent1"/>
+          </a:lnRef>
+          <a:fillRef idx="0">
+            <a:schemeClr val="accent1"/>
+          </a:fillRef>
+          <a:effectRef idx="0">
+            <a:schemeClr val="accent1"/>
+          </a:effectRef>
+          <a:fontRef idx="minor">
+            <a:schemeClr val="tx1"/>
+          </a:fontRef>
+        </p:style>
+      </p:cxnSp>
+      <p:sp>
+        <p:nvSpPr>
+          <p:cNvPr id="21" name="Arc 20">
+            <a:extLst>
+              <a:ext uri="{FF2B5EF4-FFF2-40B4-BE49-F238E27FC236}">
+                <a16:creationId xmlns:a16="http://schemas.microsoft.com/office/drawing/2014/main" id="{76B936F9-C02F-9F17-4DAE-0D2856D61948}"/>
+              </a:ext>
+            </a:extLst>
+          </p:cNvPr>
+          <p:cNvSpPr/>
+          <p:nvPr/>
+        </p:nvSpPr>
+        <p:spPr>
+          <a:xfrm rot="16200000">
+            <a:off x="7532684" y="-1535115"/>
+            <a:ext cx="2933704" cy="13852525"/>
+          </a:xfrm>
+          <a:prstGeom prst="arc">
+            <a:avLst>
+              <a:gd name="adj1" fmla="val 16200000"/>
+              <a:gd name="adj2" fmla="val 228024"/>
+            </a:avLst>
+          </a:prstGeom>
+          <a:ln w="76200">
+            <a:solidFill>
+              <a:srgbClr val="92D050"/>
+            </a:solidFill>
+          </a:ln>
+        </p:spPr>
+        <p:style>
+          <a:lnRef idx="1">
+            <a:schemeClr val="accent1"/>
+          </a:lnRef>
+          <a:fillRef idx="0">
+            <a:schemeClr val="accent1"/>
+          </a:fillRef>
+          <a:effectRef idx="0">
+            <a:schemeClr val="accent1"/>
+          </a:effectRef>
+          <a:fontRef idx="minor">
+            <a:schemeClr val="tx1"/>
+          </a:fontRef>
+        </p:style>
+        <p:txBody>
+          <a:bodyPr rtlCol="0" anchor="ctr"/>
+          <a:lstStyle/>
+          <a:p>
+            <a:pPr algn="ctr"/>
+            <a:endParaRPr lang="en-PH"/>
+          </a:p>
+        </p:txBody>
+      </p:sp>
+      <p:sp>
+        <p:nvSpPr>
+          <p:cNvPr id="22" name="TextBox 21">
+            <a:extLst>
+              <a:ext uri="{FF2B5EF4-FFF2-40B4-BE49-F238E27FC236}">
+                <a16:creationId xmlns:a16="http://schemas.microsoft.com/office/drawing/2014/main" id="{8F8758B3-63DD-7F54-E423-C1A6D72A320D}"/>
+              </a:ext>
+            </a:extLst>
+          </p:cNvPr>
+          <p:cNvSpPr txBox="1"/>
+          <p:nvPr/>
+        </p:nvSpPr>
+        <p:spPr>
+          <a:xfrm>
+            <a:off x="8179435" y="1667966"/>
+            <a:ext cx="1313180" cy="707886"/>
+          </a:xfrm>
+          <a:prstGeom prst="rect">
+            <a:avLst/>
+          </a:prstGeom>
+          <a:noFill/>
+        </p:spPr>
+        <p:txBody>
+          <a:bodyPr wrap="none" rtlCol="0">
+            <a:spAutoFit/>
+          </a:bodyPr>
+          <a:lstStyle/>
+          <a:p>
+            <a:r>
+              <a:rPr lang="en-PH" sz="4000" b="1" dirty="0">
+                <a:solidFill>
+                  <a:srgbClr val="FFFF00"/>
+                </a:solidFill>
+                <a:latin typeface="Consolas" panose="020B0609020204030204" pitchFamily="49" charset="0"/>
+              </a:rPr>
+              <a:t>O(n)</a:t>
+            </a:r>
+          </a:p>
+        </p:txBody>
+      </p:sp>
+      <p:sp>
+        <p:nvSpPr>
+          <p:cNvPr id="23" name="TextBox 22">
+            <a:extLst>
+              <a:ext uri="{FF2B5EF4-FFF2-40B4-BE49-F238E27FC236}">
+                <a16:creationId xmlns:a16="http://schemas.microsoft.com/office/drawing/2014/main" id="{EA92589D-01F8-E081-6EFA-994E3857E789}"/>
+              </a:ext>
+            </a:extLst>
+          </p:cNvPr>
+          <p:cNvSpPr txBox="1"/>
+          <p:nvPr/>
+        </p:nvSpPr>
+        <p:spPr>
+          <a:xfrm>
+            <a:off x="9447153" y="3489146"/>
+            <a:ext cx="2441694" cy="707886"/>
+          </a:xfrm>
+          <a:prstGeom prst="rect">
+            <a:avLst/>
+          </a:prstGeom>
+          <a:noFill/>
+        </p:spPr>
+        <p:txBody>
+          <a:bodyPr wrap="none" rtlCol="0">
+            <a:spAutoFit/>
+          </a:bodyPr>
+          <a:lstStyle/>
+          <a:p>
+            <a:r>
+              <a:rPr lang="en-PH" sz="4000" b="1" dirty="0">
+                <a:solidFill>
+                  <a:srgbClr val="92D050"/>
+                </a:solidFill>
+                <a:latin typeface="Consolas" panose="020B0609020204030204" pitchFamily="49" charset="0"/>
+              </a:rPr>
+              <a:t>O(log n)</a:t>
+            </a:r>
+          </a:p>
+        </p:txBody>
+      </p:sp>
+      <p:sp>
+        <p:nvSpPr>
+          <p:cNvPr id="24" name="Freeform: Shape 23">
+            <a:extLst>
+              <a:ext uri="{FF2B5EF4-FFF2-40B4-BE49-F238E27FC236}">
+                <a16:creationId xmlns:a16="http://schemas.microsoft.com/office/drawing/2014/main" id="{CFCC477B-3E1B-A755-FF87-E30DDAC96404}"/>
+              </a:ext>
+            </a:extLst>
+          </p:cNvPr>
+          <p:cNvSpPr/>
+          <p:nvPr/>
+        </p:nvSpPr>
+        <p:spPr>
+          <a:xfrm>
+            <a:off x="2109019" y="730045"/>
+            <a:ext cx="4856961" cy="4675239"/>
+          </a:xfrm>
+          <a:custGeom>
+            <a:avLst/>
+            <a:gdLst>
+              <a:gd name="csX0" fmla="*/ 0 w 4856961"/>
+              <a:gd name="csY0" fmla="*/ 4675239 h 4675239"/>
+              <a:gd name="csX1" fmla="*/ 4100052 w 4856961"/>
+              <a:gd name="csY1" fmla="*/ 1932039 h 4675239"/>
+              <a:gd name="csX2" fmla="*/ 4844846 w 4856961"/>
+              <a:gd name="csY2" fmla="*/ 0 h 4675239"/>
+            </a:gdLst>
+            <a:ahLst/>
+            <a:cxnLst>
+              <a:cxn ang="0">
+                <a:pos x="csX0" y="csY0"/>
+              </a:cxn>
+              <a:cxn ang="0">
+                <a:pos x="csX1" y="csY1"/>
+              </a:cxn>
+              <a:cxn ang="0">
+                <a:pos x="csX2" y="csY2"/>
+              </a:cxn>
+            </a:cxnLst>
+            <a:rect l="l" t="t" r="r" b="b"/>
+            <a:pathLst>
+              <a:path w="4856961" h="4675239">
+                <a:moveTo>
+                  <a:pt x="0" y="4675239"/>
+                </a:moveTo>
+                <a:cubicBezTo>
+                  <a:pt x="1646289" y="3693242"/>
+                  <a:pt x="3292578" y="2711245"/>
+                  <a:pt x="4100052" y="1932039"/>
+                </a:cubicBezTo>
+                <a:cubicBezTo>
+                  <a:pt x="4907526" y="1152833"/>
+                  <a:pt x="4876186" y="576416"/>
+                  <a:pt x="4844846" y="0"/>
+                </a:cubicBezTo>
+              </a:path>
+            </a:pathLst>
+          </a:custGeom>
+          <a:noFill/>
+          <a:ln w="76200">
+            <a:solidFill>
+              <a:srgbClr val="FFC000"/>
+            </a:solidFill>
+          </a:ln>
+        </p:spPr>
+        <p:style>
+          <a:lnRef idx="2">
+            <a:schemeClr val="accent1">
+              <a:shade val="15000"/>
+            </a:schemeClr>
+          </a:lnRef>
+          <a:fillRef idx="1">
+            <a:schemeClr val="accent1"/>
+          </a:fillRef>
+          <a:effectRef idx="0">
+            <a:schemeClr val="accent1"/>
+          </a:effectRef>
+          <a:fontRef idx="minor">
+            <a:schemeClr val="lt1"/>
+          </a:fontRef>
+        </p:style>
+        <p:txBody>
+          <a:bodyPr rtlCol="0" anchor="ctr"/>
+          <a:lstStyle/>
+          <a:p>
+            <a:pPr algn="ctr"/>
+            <a:endParaRPr lang="en-PH"/>
+          </a:p>
+        </p:txBody>
+      </p:sp>
+      <p:sp>
+        <p:nvSpPr>
+          <p:cNvPr id="25" name="TextBox 24">
+            <a:extLst>
+              <a:ext uri="{FF2B5EF4-FFF2-40B4-BE49-F238E27FC236}">
+                <a16:creationId xmlns:a16="http://schemas.microsoft.com/office/drawing/2014/main" id="{2B982E6D-3B32-139D-FF41-9A5BE47D8778}"/>
+              </a:ext>
+            </a:extLst>
+          </p:cNvPr>
+          <p:cNvSpPr txBox="1"/>
+          <p:nvPr/>
+        </p:nvSpPr>
+        <p:spPr>
+          <a:xfrm>
+            <a:off x="7106498" y="148493"/>
+            <a:ext cx="3005951" cy="707886"/>
+          </a:xfrm>
+          <a:prstGeom prst="rect">
+            <a:avLst/>
+          </a:prstGeom>
+          <a:noFill/>
+        </p:spPr>
+        <p:txBody>
+          <a:bodyPr wrap="none" rtlCol="0">
+            <a:spAutoFit/>
+          </a:bodyPr>
+          <a:lstStyle/>
+          <a:p>
+            <a:r>
+              <a:rPr lang="en-PH" sz="4000" b="1" dirty="0">
+                <a:solidFill>
+                  <a:srgbClr val="FFC000"/>
+                </a:solidFill>
+                <a:latin typeface="Consolas" panose="020B0609020204030204" pitchFamily="49" charset="0"/>
+              </a:rPr>
+              <a:t>O(n log n)</a:t>
+            </a:r>
+          </a:p>
+        </p:txBody>
+      </p:sp>
+      <p:sp>
+        <p:nvSpPr>
+          <p:cNvPr id="26" name="TextBox 25">
+            <a:extLst>
+              <a:ext uri="{FF2B5EF4-FFF2-40B4-BE49-F238E27FC236}">
+                <a16:creationId xmlns:a16="http://schemas.microsoft.com/office/drawing/2014/main" id="{95E026FD-7FA5-CBF6-D743-8BC16781D1B8}"/>
+              </a:ext>
+            </a:extLst>
+          </p:cNvPr>
+          <p:cNvSpPr txBox="1"/>
+          <p:nvPr/>
+        </p:nvSpPr>
+        <p:spPr>
+          <a:xfrm>
+            <a:off x="7177030" y="757567"/>
+            <a:ext cx="3147015" cy="1015663"/>
+          </a:xfrm>
+          <a:prstGeom prst="rect">
+            <a:avLst/>
+          </a:prstGeom>
+          <a:noFill/>
+        </p:spPr>
+        <p:txBody>
+          <a:bodyPr wrap="none" rtlCol="0">
+            <a:spAutoFit/>
+          </a:bodyPr>
+          <a:lstStyle/>
+          <a:p>
+            <a:r>
+              <a:rPr lang="en-PH" sz="1500" b="1" dirty="0">
+                <a:solidFill>
+                  <a:srgbClr val="FFC000"/>
+                </a:solidFill>
+                <a:latin typeface="Consolas" panose="020B0609020204030204" pitchFamily="49" charset="0"/>
+              </a:rPr>
+              <a:t>O(n log n)= quasilinear time</a:t>
+            </a:r>
+          </a:p>
+          <a:p>
+            <a:pPr marL="285750" indent="-285750">
+              <a:buFont typeface="Arial" panose="020B0604020202020204" pitchFamily="34" charset="0"/>
+              <a:buChar char="•"/>
+            </a:pPr>
+            <a:r>
+              <a:rPr lang="en-PH" sz="1500" b="1" dirty="0">
+                <a:solidFill>
+                  <a:srgbClr val="FFC000"/>
+                </a:solidFill>
+                <a:latin typeface="Consolas" panose="020B0609020204030204" pitchFamily="49" charset="0"/>
+              </a:rPr>
+              <a:t>quicksort</a:t>
+            </a:r>
+          </a:p>
+          <a:p>
+            <a:pPr marL="285750" indent="-285750">
+              <a:buFont typeface="Arial" panose="020B0604020202020204" pitchFamily="34" charset="0"/>
+              <a:buChar char="•"/>
+            </a:pPr>
+            <a:r>
+              <a:rPr lang="en-PH" sz="1500" b="1" dirty="0" err="1">
+                <a:solidFill>
+                  <a:srgbClr val="FFC000"/>
+                </a:solidFill>
+                <a:latin typeface="Consolas" panose="020B0609020204030204" pitchFamily="49" charset="0"/>
+              </a:rPr>
+              <a:t>mergesort</a:t>
+            </a:r>
+            <a:endParaRPr lang="en-PH" sz="1500" b="1" dirty="0">
+              <a:solidFill>
+                <a:srgbClr val="FFC000"/>
+              </a:solidFill>
+              <a:latin typeface="Consolas" panose="020B0609020204030204" pitchFamily="49" charset="0"/>
+            </a:endParaRPr>
+          </a:p>
+          <a:p>
+            <a:pPr marL="285750" indent="-285750">
+              <a:buFont typeface="Arial" panose="020B0604020202020204" pitchFamily="34" charset="0"/>
+              <a:buChar char="•"/>
+            </a:pPr>
+            <a:r>
+              <a:rPr lang="en-PH" sz="1500" b="1" dirty="0">
+                <a:solidFill>
+                  <a:srgbClr val="FFC000"/>
+                </a:solidFill>
+                <a:latin typeface="Consolas" panose="020B0609020204030204" pitchFamily="49" charset="0"/>
+              </a:rPr>
+              <a:t>heapsort</a:t>
+            </a:r>
+          </a:p>
+        </p:txBody>
+      </p:sp>
+    </p:spTree>
+    <p:extLst>
+      <p:ext uri="{BB962C8B-B14F-4D97-AF65-F5344CB8AC3E}">
+        <p14:creationId xmlns:p14="http://schemas.microsoft.com/office/powerpoint/2010/main" val="2076555341"/>
+      </p:ext>
+    </p:extLst>
+  </p:cSld>
+  <p:clrMapOvr>
+    <a:masterClrMapping/>
+  </p:clrMapOvr>
+  <p:timing>
+    <p:tnLst>
+      <p:par>
+        <p:cTn id="1" dur="indefinite" restart="never" nodeType="tmRoot">
+          <p:childTnLst>
+            <p:seq concurrent="1" nextAc="seek">
+              <p:cTn id="2" dur="indefinite" nodeType="mainSeq">
+                <p:childTnLst>
+                  <p:par>
+                    <p:cTn id="3" fill="hold">
+                      <p:stCondLst>
+                        <p:cond delay="indefinite"/>
+                      </p:stCondLst>
+                      <p:childTnLst>
+                        <p:par>
+                          <p:cTn id="4" fill="hold">
+                            <p:stCondLst>
+                              <p:cond delay="0"/>
+                            </p:stCondLst>
+                            <p:childTnLst>
+                              <p:par>
+                                <p:cTn id="5" presetID="22" presetClass="entr" presetSubtype="4" fill="hold" grpId="0" nodeType="clickEffect">
+                                  <p:stCondLst>
+                                    <p:cond delay="0"/>
+                                  </p:stCondLst>
+                                  <p:childTnLst>
+                                    <p:set>
+                                      <p:cBhvr>
+                                        <p:cTn id="6" dur="1" fill="hold">
+                                          <p:stCondLst>
+                                            <p:cond delay="0"/>
+                                          </p:stCondLst>
+                                        </p:cTn>
+                                        <p:tgtEl>
+                                          <p:spTgt spid="24"/>
+                                        </p:tgtEl>
+                                        <p:attrNameLst>
+                                          <p:attrName>style.visibility</p:attrName>
+                                        </p:attrNameLst>
+                                      </p:cBhvr>
+                                      <p:to>
+                                        <p:strVal val="visible"/>
+                                      </p:to>
+                                    </p:set>
+                                    <p:animEffect transition="in" filter="wipe(down)">
+                                      <p:cBhvr>
+                                        <p:cTn id="7" dur="500"/>
+                                        <p:tgtEl>
+                                          <p:spTgt spid="24"/>
+                                        </p:tgtEl>
+                                      </p:cBhvr>
+                                    </p:animEffect>
+                                  </p:childTnLst>
+                                </p:cTn>
+                              </p:par>
+                            </p:childTnLst>
+                          </p:cTn>
+                        </p:par>
+                      </p:childTnLst>
+                    </p:cTn>
+                  </p:par>
+                  <p:par>
+                    <p:cTn id="8" fill="hold">
+                      <p:stCondLst>
+                        <p:cond delay="indefinite"/>
+                      </p:stCondLst>
+                      <p:childTnLst>
+                        <p:par>
+                          <p:cTn id="9" fill="hold">
+                            <p:stCondLst>
+                              <p:cond delay="0"/>
+                            </p:stCondLst>
+                            <p:childTnLst>
+                              <p:par>
+                                <p:cTn id="10" presetID="10" presetClass="entr" presetSubtype="0" fill="hold" grpId="0" nodeType="clickEffect">
+                                  <p:stCondLst>
+                                    <p:cond delay="0"/>
+                                  </p:stCondLst>
+                                  <p:childTnLst>
+                                    <p:set>
+                                      <p:cBhvr>
+                                        <p:cTn id="11" dur="1" fill="hold">
+                                          <p:stCondLst>
+                                            <p:cond delay="0"/>
+                                          </p:stCondLst>
+                                        </p:cTn>
+                                        <p:tgtEl>
+                                          <p:spTgt spid="25"/>
+                                        </p:tgtEl>
+                                        <p:attrNameLst>
+                                          <p:attrName>style.visibility</p:attrName>
+                                        </p:attrNameLst>
+                                      </p:cBhvr>
+                                      <p:to>
+                                        <p:strVal val="visible"/>
+                                      </p:to>
+                                    </p:set>
+                                    <p:animEffect transition="in" filter="fade">
+                                      <p:cBhvr>
+                                        <p:cTn id="12" dur="500"/>
+                                        <p:tgtEl>
+                                          <p:spTgt spid="25"/>
+                                        </p:tgtEl>
+                                      </p:cBhvr>
+                                    </p:animEffect>
+                                  </p:childTnLst>
+                                </p:cTn>
+                              </p:par>
+                              <p:par>
+                                <p:cTn id="13" presetID="10" presetClass="entr" presetSubtype="0" fill="hold" grpId="0" nodeType="withEffect">
+                                  <p:stCondLst>
+                                    <p:cond delay="0"/>
+                                  </p:stCondLst>
+                                  <p:childTnLst>
+                                    <p:set>
+                                      <p:cBhvr>
+                                        <p:cTn id="14" dur="1" fill="hold">
+                                          <p:stCondLst>
+                                            <p:cond delay="0"/>
+                                          </p:stCondLst>
+                                        </p:cTn>
+                                        <p:tgtEl>
+                                          <p:spTgt spid="26"/>
+                                        </p:tgtEl>
+                                        <p:attrNameLst>
+                                          <p:attrName>style.visibility</p:attrName>
+                                        </p:attrNameLst>
+                                      </p:cBhvr>
+                                      <p:to>
+                                        <p:strVal val="visible"/>
+                                      </p:to>
+                                    </p:set>
+                                    <p:animEffect transition="in" filter="fade">
+                                      <p:cBhvr>
+                                        <p:cTn id="15" dur="500"/>
+                                        <p:tgtEl>
+                                          <p:spTgt spid="26"/>
+                                        </p:tgtEl>
+                                      </p:cBhvr>
+                                    </p:animEffect>
+                                  </p:childTnLst>
+                                </p:cTn>
+                              </p:par>
+                            </p:childTnLst>
+                          </p:cTn>
+                        </p:par>
+                      </p:childTnLst>
+                    </p:cTn>
+                  </p:par>
+                </p:childTnLst>
+              </p:cTn>
+              <p:prevCondLst>
+                <p:cond evt="onPrev" delay="0">
+                  <p:tgtEl>
+                    <p:sldTgt/>
+                  </p:tgtEl>
+                </p:cond>
+              </p:prevCondLst>
+              <p:nextCondLst>
+                <p:cond evt="onNext" delay="0">
+                  <p:tgtEl>
+                    <p:sldTgt/>
+                  </p:tgtEl>
+                </p:cond>
+              </p:nextCondLst>
+            </p:seq>
+          </p:childTnLst>
+        </p:cTn>
+      </p:par>
+    </p:tnLst>
+    <p:bldLst>
+      <p:bldP spid="24" grpId="0" animBg="1"/>
+      <p:bldP spid="25" grpId="0"/>
+      <p:bldP spid="26" grpId="0"/>
     </p:bldLst>
   </p:timing>
 </p:sld>
@@ -17841,6 +18731,15 @@
 </file>
 
 <file path=customXml/item2.xml><?xml version="1.0" encoding="utf-8"?>
+<?mso-contentType ?>
+<FormTemplates xmlns="http://schemas.microsoft.com/sharepoint/v3/contenttype/forms">
+  <Display>DocumentLibraryForm</Display>
+  <Edit>DocumentLibraryForm</Edit>
+  <New>DocumentLibraryForm</New>
+</FormTemplates>
+</file>
+
+<file path=customXml/item3.xml><?xml version="1.0" encoding="utf-8"?>
 <ct:contentTypeSchema xmlns:ct="http://schemas.microsoft.com/office/2006/metadata/contentType" xmlns:ma="http://schemas.microsoft.com/office/2006/metadata/properties/metaAttributes" ct:_="" ma:_="" ma:contentTypeName="Document" ma:contentTypeID="0x0101007188BDCA587B344BBA6CB1A93FAE6998" ma:contentTypeVersion="2" ma:contentTypeDescription="Create a new document." ma:contentTypeScope="" ma:versionID="7a8e4b6720badb2566a0cfeddfaf2856">
   <xsd:schema xmlns:xsd="http://www.w3.org/2001/XMLSchema" xmlns:xs="http://www.w3.org/2001/XMLSchema" xmlns:p="http://schemas.microsoft.com/office/2006/metadata/properties" xmlns:ns2="ba111d12-426d-4af0-bcb6-460e36974645" targetNamespace="http://schemas.microsoft.com/office/2006/metadata/properties" ma:root="true" ma:fieldsID="989b05398519136c88ba0a8d54e3c3da" ns2:_="">
     <xsd:import namespace="ba111d12-426d-4af0-bcb6-460e36974645"/>
@@ -17972,15 +18871,6 @@
 </ct:contentTypeSchema>
 </file>
 
-<file path=customXml/item3.xml><?xml version="1.0" encoding="utf-8"?>
-<?mso-contentType ?>
-<FormTemplates xmlns="http://schemas.microsoft.com/sharepoint/v3/contenttype/forms">
-  <Display>DocumentLibraryForm</Display>
-  <Edit>DocumentLibraryForm</Edit>
-  <New>DocumentLibraryForm</New>
-</FormTemplates>
-</file>
-
 <file path=customXml/itemProps1.xml><?xml version="1.0" encoding="utf-8"?>
 <ds:datastoreItem xmlns:ds="http://schemas.openxmlformats.org/officeDocument/2006/customXml" ds:itemID="{EA3362E2-FA54-4262-AE94-2FA98FF8142D}">
   <ds:schemaRefs>
@@ -17991,6 +18881,14 @@
 </file>
 
 <file path=customXml/itemProps2.xml><?xml version="1.0" encoding="utf-8"?>
+<ds:datastoreItem xmlns:ds="http://schemas.openxmlformats.org/officeDocument/2006/customXml" ds:itemID="{651370AF-26B9-4AFA-BA9D-5D4A7E1A6722}">
+  <ds:schemaRefs>
+    <ds:schemaRef ds:uri="http://schemas.microsoft.com/sharepoint/v3/contenttype/forms"/>
+  </ds:schemaRefs>
+</ds:datastoreItem>
+</file>
+
+<file path=customXml/itemProps3.xml><?xml version="1.0" encoding="utf-8"?>
 <ds:datastoreItem xmlns:ds="http://schemas.openxmlformats.org/officeDocument/2006/customXml" ds:itemID="{3D61E20B-708A-4719-8C02-DA91A478A7AB}">
   <ds:schemaRefs>
     <ds:schemaRef ds:uri="http://schemas.microsoft.com/office/2006/metadata/contentType"/>
@@ -18006,12 +18904,4 @@
     <ds:schemaRef ds:uri="http://schemas.microsoft.com/internal/obd"/>
   </ds:schemaRefs>
 </ds:datastoreItem>
-</file>
-
-<file path=customXml/itemProps3.xml><?xml version="1.0" encoding="utf-8"?>
-<ds:datastoreItem xmlns:ds="http://schemas.openxmlformats.org/officeDocument/2006/customXml" ds:itemID="{651370AF-26B9-4AFA-BA9D-5D4A7E1A6722}">
-  <ds:schemaRefs>
-    <ds:schemaRef ds:uri="http://schemas.microsoft.com/sharepoint/v3/contenttype/forms"/>
-  </ds:schemaRefs>
-</ds:datastoreItem>
 </file>
--- a/sorting_algorithms/Quick Sort.pptx
+++ b/sorting_algorithms/Quick Sort.pptx
@@ -5335,7 +5335,7 @@
     <p:bg>
       <p:bgPr>
         <a:solidFill>
-          <a:schemeClr val="bg1"/>
+          <a:schemeClr val="tx1"/>
         </a:solidFill>
         <a:effectLst/>
       </p:bgPr>
@@ -5383,10 +5383,18 @@
           <a:lstStyle/>
           <a:p>
             <a:r>
-              <a:rPr lang="en-US" b="1" dirty="0"/>
+              <a:rPr lang="en-US" b="1" dirty="0">
+                <a:solidFill>
+                  <a:srgbClr val="00B050"/>
+                </a:solidFill>
+              </a:rPr>
               <a:t>What is Quick Sort?</a:t>
             </a:r>
-            <a:endParaRPr lang="en-PH" b="1" dirty="0"/>
+            <a:endParaRPr lang="en-PH" b="1" dirty="0">
+              <a:solidFill>
+                <a:srgbClr val="00B050"/>
+              </a:solidFill>
+            </a:endParaRPr>
           </a:p>
         </p:txBody>
       </p:sp>
@@ -5512,12 +5520,18 @@
             <a:pPr algn="l"/>
             <a:r>
               <a:rPr lang="en-US" sz="3000" dirty="0" err="1">
+                <a:solidFill>
+                  <a:schemeClr val="bg1"/>
+                </a:solidFill>
                 <a:latin typeface="Calibri Body"/>
               </a:rPr>
               <a:t>QuickSort</a:t>
             </a:r>
             <a:r>
               <a:rPr lang="en-US" sz="3000" dirty="0">
+                <a:solidFill>
+                  <a:schemeClr val="bg1"/>
+                </a:solidFill>
                 <a:latin typeface="Calibri Body"/>
               </a:rPr>
               <a:t> is based on the </a:t>
@@ -5525,26 +5539,44 @@
             <a:r>
               <a:rPr lang="en-US" sz="3000" b="1" dirty="0">
                 <a:solidFill>
-                  <a:srgbClr val="0070C0"/>
+                  <a:srgbClr val="00B0F0"/>
                 </a:solidFill>
                 <a:latin typeface="Calibri Body"/>
               </a:rPr>
-              <a:t>Divide and Conquer algorithm </a:t>
+              <a:t>Divide and Conquer algorithm</a:t>
+            </a:r>
+            <a:r>
+              <a:rPr lang="en-US" sz="3000" b="1" dirty="0">
+                <a:solidFill>
+                  <a:schemeClr val="bg1"/>
+                </a:solidFill>
+                <a:latin typeface="Calibri Body"/>
+              </a:rPr>
+              <a:t> </a:t>
             </a:r>
             <a:r>
               <a:rPr lang="en-US" sz="3000" dirty="0">
+                <a:solidFill>
+                  <a:schemeClr val="bg1"/>
+                </a:solidFill>
                 <a:latin typeface="Calibri Body"/>
               </a:rPr>
               <a:t>that picks an element as a </a:t>
             </a:r>
             <a:r>
               <a:rPr lang="en-US" sz="3000" b="1" dirty="0">
+                <a:solidFill>
+                  <a:schemeClr val="bg1"/>
+                </a:solidFill>
                 <a:latin typeface="Calibri Body"/>
               </a:rPr>
               <a:t>pivot</a:t>
             </a:r>
             <a:r>
               <a:rPr lang="en-US" sz="3000" dirty="0">
+                <a:solidFill>
+                  <a:schemeClr val="bg1"/>
+                </a:solidFill>
                 <a:latin typeface="Calibri Body"/>
               </a:rPr>
               <a:t> and partitions the given array around the picked pivot by placing the pivot in its correct position in the sorted array.</a:t>
@@ -5607,7 +5639,7 @@
     <p:bg>
       <p:bgPr>
         <a:solidFill>
-          <a:schemeClr val="bg1"/>
+          <a:schemeClr val="tx1"/>
         </a:solidFill>
         <a:effectLst/>
       </p:bgPr>
@@ -5655,10 +5687,18 @@
           <a:lstStyle/>
           <a:p>
             <a:r>
-              <a:rPr lang="en-US" b="1" dirty="0"/>
+              <a:rPr lang="en-US" b="1" dirty="0">
+                <a:solidFill>
+                  <a:srgbClr val="00B050"/>
+                </a:solidFill>
+              </a:rPr>
               <a:t>What is Quick Sort?</a:t>
             </a:r>
-            <a:endParaRPr lang="en-PH" b="1" dirty="0"/>
+            <a:endParaRPr lang="en-PH" b="1" dirty="0">
+              <a:solidFill>
+                <a:srgbClr val="00B050"/>
+              </a:solidFill>
+            </a:endParaRPr>
           </a:p>
         </p:txBody>
       </p:sp>
@@ -6380,7 +6420,7 @@
     <p:bg>
       <p:bgPr>
         <a:solidFill>
-          <a:schemeClr val="bg1"/>
+          <a:schemeClr val="tx1"/>
         </a:solidFill>
         <a:effectLst/>
       </p:bgPr>
@@ -6428,10 +6468,18 @@
           <a:lstStyle/>
           <a:p>
             <a:r>
-              <a:rPr lang="en-US" b="1" dirty="0"/>
+              <a:rPr lang="en-US" b="1" dirty="0">
+                <a:solidFill>
+                  <a:srgbClr val="00B050"/>
+                </a:solidFill>
+              </a:rPr>
               <a:t>What is Quick Sort?</a:t>
             </a:r>
-            <a:endParaRPr lang="en-PH" b="1" dirty="0"/>
+            <a:endParaRPr lang="en-PH" b="1" dirty="0">
+              <a:solidFill>
+                <a:srgbClr val="00B050"/>
+              </a:solidFill>
+            </a:endParaRPr>
           </a:p>
         </p:txBody>
       </p:sp>
@@ -6910,7 +6958,7 @@
     <p:bg>
       <p:bgPr>
         <a:solidFill>
-          <a:schemeClr val="bg1"/>
+          <a:schemeClr val="tx1"/>
         </a:solidFill>
         <a:effectLst/>
       </p:bgPr>
@@ -6958,10 +7006,18 @@
           <a:lstStyle/>
           <a:p>
             <a:r>
-              <a:rPr lang="en-US" b="1" dirty="0"/>
+              <a:rPr lang="en-US" b="1" dirty="0">
+                <a:solidFill>
+                  <a:srgbClr val="00B050"/>
+                </a:solidFill>
+              </a:rPr>
               <a:t>What is Quick Sort?</a:t>
             </a:r>
-            <a:endParaRPr lang="en-PH" b="1" dirty="0"/>
+            <a:endParaRPr lang="en-PH" b="1" dirty="0">
+              <a:solidFill>
+                <a:srgbClr val="00B050"/>
+              </a:solidFill>
+            </a:endParaRPr>
           </a:p>
         </p:txBody>
       </p:sp>
@@ -7440,7 +7496,7 @@
     <p:bg>
       <p:bgPr>
         <a:solidFill>
-          <a:schemeClr val="bg1"/>
+          <a:schemeClr val="tx1"/>
         </a:solidFill>
         <a:effectLst/>
       </p:bgPr>
@@ -7488,10 +7544,18 @@
           <a:lstStyle/>
           <a:p>
             <a:r>
-              <a:rPr lang="en-US" b="1" dirty="0"/>
+              <a:rPr lang="en-US" b="1" dirty="0">
+                <a:solidFill>
+                  <a:srgbClr val="00B050"/>
+                </a:solidFill>
+              </a:rPr>
               <a:t>What is Quick Sort?</a:t>
             </a:r>
-            <a:endParaRPr lang="en-PH" b="1" dirty="0"/>
+            <a:endParaRPr lang="en-PH" b="1" dirty="0">
+              <a:solidFill>
+                <a:srgbClr val="00B050"/>
+              </a:solidFill>
+            </a:endParaRPr>
           </a:p>
         </p:txBody>
       </p:sp>
@@ -8213,7 +8277,7 @@
     <p:bg>
       <p:bgPr>
         <a:solidFill>
-          <a:schemeClr val="bg1"/>
+          <a:schemeClr val="tx1"/>
         </a:solidFill>
         <a:effectLst/>
       </p:bgPr>
@@ -8261,10 +8325,18 @@
           <a:lstStyle/>
           <a:p>
             <a:r>
-              <a:rPr lang="en-US" b="1" dirty="0"/>
+              <a:rPr lang="en-US" b="1" dirty="0">
+                <a:solidFill>
+                  <a:srgbClr val="00B050"/>
+                </a:solidFill>
+              </a:rPr>
               <a:t>What is Quick Sort?</a:t>
             </a:r>
-            <a:endParaRPr lang="en-PH" b="1" dirty="0"/>
+            <a:endParaRPr lang="en-PH" b="1" dirty="0">
+              <a:solidFill>
+                <a:srgbClr val="00B050"/>
+              </a:solidFill>
+            </a:endParaRPr>
           </a:p>
         </p:txBody>
       </p:sp>
@@ -8743,7 +8815,7 @@
     <p:bg>
       <p:bgPr>
         <a:solidFill>
-          <a:schemeClr val="bg1"/>
+          <a:schemeClr val="tx1"/>
         </a:solidFill>
         <a:effectLst/>
       </p:bgPr>
@@ -8791,10 +8863,18 @@
           <a:lstStyle/>
           <a:p>
             <a:r>
-              <a:rPr lang="en-US" b="1" dirty="0"/>
+              <a:rPr lang="en-US" b="1" dirty="0">
+                <a:solidFill>
+                  <a:srgbClr val="00B050"/>
+                </a:solidFill>
+              </a:rPr>
               <a:t>What is Quick Sort?</a:t>
             </a:r>
-            <a:endParaRPr lang="en-PH" b="1" dirty="0"/>
+            <a:endParaRPr lang="en-PH" b="1" dirty="0">
+              <a:solidFill>
+                <a:srgbClr val="00B050"/>
+              </a:solidFill>
+            </a:endParaRPr>
           </a:p>
         </p:txBody>
       </p:sp>
@@ -9516,7 +9596,7 @@
     <p:bg>
       <p:bgPr>
         <a:solidFill>
-          <a:schemeClr val="bg1"/>
+          <a:schemeClr val="tx1"/>
         </a:solidFill>
         <a:effectLst/>
       </p:bgPr>
@@ -9564,10 +9644,18 @@
           <a:lstStyle/>
           <a:p>
             <a:r>
-              <a:rPr lang="en-US" b="1" dirty="0"/>
+              <a:rPr lang="en-US" b="1" dirty="0">
+                <a:solidFill>
+                  <a:srgbClr val="00B050"/>
+                </a:solidFill>
+              </a:rPr>
               <a:t>What is Quick Sort?</a:t>
             </a:r>
-            <a:endParaRPr lang="en-PH" b="1" dirty="0"/>
+            <a:endParaRPr lang="en-PH" b="1" dirty="0">
+              <a:solidFill>
+                <a:srgbClr val="00B050"/>
+              </a:solidFill>
+            </a:endParaRPr>
           </a:p>
         </p:txBody>
       </p:sp>
@@ -10046,7 +10134,7 @@
     <p:bg>
       <p:bgPr>
         <a:solidFill>
-          <a:schemeClr val="bg1"/>
+          <a:schemeClr val="tx1"/>
         </a:solidFill>
         <a:effectLst/>
       </p:bgPr>
@@ -10094,10 +10182,18 @@
           <a:lstStyle/>
           <a:p>
             <a:r>
-              <a:rPr lang="en-US" b="1" dirty="0"/>
+              <a:rPr lang="en-US" b="1" dirty="0">
+                <a:solidFill>
+                  <a:srgbClr val="00B050"/>
+                </a:solidFill>
+              </a:rPr>
               <a:t>What is Quick Sort?</a:t>
             </a:r>
-            <a:endParaRPr lang="en-PH" b="1" dirty="0"/>
+            <a:endParaRPr lang="en-PH" b="1" dirty="0">
+              <a:solidFill>
+                <a:srgbClr val="00B050"/>
+              </a:solidFill>
+            </a:endParaRPr>
           </a:p>
         </p:txBody>
       </p:sp>
@@ -10819,7 +10915,7 @@
     <p:bg>
       <p:bgPr>
         <a:solidFill>
-          <a:schemeClr val="bg1"/>
+          <a:schemeClr val="tx1"/>
         </a:solidFill>
         <a:effectLst/>
       </p:bgPr>
@@ -10867,10 +10963,18 @@
           <a:lstStyle/>
           <a:p>
             <a:r>
-              <a:rPr lang="en-US" b="1" dirty="0"/>
+              <a:rPr lang="en-US" b="1" dirty="0">
+                <a:solidFill>
+                  <a:srgbClr val="00B050"/>
+                </a:solidFill>
+              </a:rPr>
               <a:t>What is Quick Sort?</a:t>
             </a:r>
-            <a:endParaRPr lang="en-PH" b="1" dirty="0"/>
+            <a:endParaRPr lang="en-PH" b="1" dirty="0">
+              <a:solidFill>
+                <a:srgbClr val="00B050"/>
+              </a:solidFill>
+            </a:endParaRPr>
           </a:p>
         </p:txBody>
       </p:sp>
@@ -11529,7 +11633,7 @@
     <p:bg>
       <p:bgPr>
         <a:solidFill>
-          <a:schemeClr val="bg1"/>
+          <a:schemeClr val="tx1"/>
         </a:solidFill>
         <a:effectLst/>
       </p:bgPr>
@@ -11674,6 +11778,9 @@
           <a:p>
             <a:r>
               <a:rPr lang="en-PH" sz="4000" b="1" dirty="0">
+                <a:solidFill>
+                  <a:schemeClr val="bg1"/>
+                </a:solidFill>
                 <a:latin typeface="Consolas" panose="020B0609020204030204" pitchFamily="49" charset="0"/>
               </a:rPr>
               <a:t>data</a:t>
@@ -11711,6 +11818,9 @@
           <a:p>
             <a:r>
               <a:rPr lang="en-PH" sz="4000" b="1" dirty="0">
+                <a:solidFill>
+                  <a:schemeClr val="bg1"/>
+                </a:solidFill>
                 <a:latin typeface="Consolas" panose="020B0609020204030204" pitchFamily="49" charset="0"/>
               </a:rPr>
               <a:t>time</a:t>
@@ -12310,7 +12420,7 @@
     <p:bg>
       <p:bgPr>
         <a:solidFill>
-          <a:schemeClr val="bg1"/>
+          <a:schemeClr val="tx1"/>
         </a:solidFill>
         <a:effectLst/>
       </p:bgPr>
@@ -12358,10 +12468,18 @@
           <a:lstStyle/>
           <a:p>
             <a:r>
-              <a:rPr lang="en-US" b="1" dirty="0"/>
+              <a:rPr lang="en-US" b="1" dirty="0">
+                <a:solidFill>
+                  <a:srgbClr val="00B050"/>
+                </a:solidFill>
+              </a:rPr>
               <a:t>What is Quick Sort?</a:t>
             </a:r>
-            <a:endParaRPr lang="en-PH" b="1" dirty="0"/>
+            <a:endParaRPr lang="en-PH" b="1" dirty="0">
+              <a:solidFill>
+                <a:srgbClr val="00B050"/>
+              </a:solidFill>
+            </a:endParaRPr>
           </a:p>
         </p:txBody>
       </p:sp>
@@ -12840,7 +12958,7 @@
     <p:bg>
       <p:bgPr>
         <a:solidFill>
-          <a:schemeClr val="bg1"/>
+          <a:schemeClr val="tx1"/>
         </a:solidFill>
         <a:effectLst/>
       </p:bgPr>
@@ -12888,10 +13006,18 @@
           <a:lstStyle/>
           <a:p>
             <a:r>
-              <a:rPr lang="en-US" b="1" dirty="0"/>
+              <a:rPr lang="en-US" b="1" dirty="0">
+                <a:solidFill>
+                  <a:srgbClr val="00B050"/>
+                </a:solidFill>
+              </a:rPr>
               <a:t>What is Quick Sort?</a:t>
             </a:r>
-            <a:endParaRPr lang="en-PH" b="1" dirty="0"/>
+            <a:endParaRPr lang="en-PH" b="1" dirty="0">
+              <a:solidFill>
+                <a:srgbClr val="00B050"/>
+              </a:solidFill>
+            </a:endParaRPr>
           </a:p>
         </p:txBody>
       </p:sp>
@@ -13405,7 +13531,7 @@
     <p:bg>
       <p:bgPr>
         <a:solidFill>
-          <a:schemeClr val="bg1"/>
+          <a:schemeClr val="tx1"/>
         </a:solidFill>
         <a:effectLst/>
       </p:bgPr>
@@ -13453,10 +13579,18 @@
           <a:lstStyle/>
           <a:p>
             <a:r>
-              <a:rPr lang="en-US" b="1" dirty="0"/>
+              <a:rPr lang="en-US" b="1" dirty="0">
+                <a:solidFill>
+                  <a:srgbClr val="00B050"/>
+                </a:solidFill>
+              </a:rPr>
               <a:t>What is Quick Sort?</a:t>
             </a:r>
-            <a:endParaRPr lang="en-PH" b="1" dirty="0"/>
+            <a:endParaRPr lang="en-PH" b="1" dirty="0">
+              <a:solidFill>
+                <a:srgbClr val="00B050"/>
+              </a:solidFill>
+            </a:endParaRPr>
           </a:p>
         </p:txBody>
       </p:sp>
@@ -14224,7 +14358,7 @@
     <p:bg>
       <p:bgPr>
         <a:solidFill>
-          <a:schemeClr val="bg1"/>
+          <a:schemeClr val="tx1"/>
         </a:solidFill>
         <a:effectLst/>
       </p:bgPr>
@@ -14272,10 +14406,18 @@
           <a:lstStyle/>
           <a:p>
             <a:r>
-              <a:rPr lang="en-US" b="1" dirty="0"/>
+              <a:rPr lang="en-US" b="1" dirty="0">
+                <a:solidFill>
+                  <a:srgbClr val="00B050"/>
+                </a:solidFill>
+              </a:rPr>
               <a:t>What is Quick Sort?</a:t>
             </a:r>
-            <a:endParaRPr lang="en-PH" b="1" dirty="0"/>
+            <a:endParaRPr lang="en-PH" b="1" dirty="0">
+              <a:solidFill>
+                <a:srgbClr val="00B050"/>
+              </a:solidFill>
+            </a:endParaRPr>
           </a:p>
         </p:txBody>
       </p:sp>
@@ -15066,7 +15208,7 @@
     <p:bg>
       <p:bgPr>
         <a:solidFill>
-          <a:schemeClr val="bg1"/>
+          <a:schemeClr val="tx1"/>
         </a:solidFill>
         <a:effectLst/>
       </p:bgPr>
@@ -15114,10 +15256,18 @@
           <a:lstStyle/>
           <a:p>
             <a:r>
-              <a:rPr lang="en-US" b="1" dirty="0"/>
+              <a:rPr lang="en-US" b="1" dirty="0">
+                <a:solidFill>
+                  <a:srgbClr val="00B050"/>
+                </a:solidFill>
+              </a:rPr>
               <a:t>What is Quick Sort?</a:t>
             </a:r>
-            <a:endParaRPr lang="en-PH" b="1" dirty="0"/>
+            <a:endParaRPr lang="en-PH" b="1" dirty="0">
+              <a:solidFill>
+                <a:srgbClr val="00B050"/>
+              </a:solidFill>
+            </a:endParaRPr>
           </a:p>
         </p:txBody>
       </p:sp>
@@ -15908,7 +16058,7 @@
     <p:bg>
       <p:bgPr>
         <a:solidFill>
-          <a:schemeClr val="bg1"/>
+          <a:schemeClr val="tx1"/>
         </a:solidFill>
         <a:effectLst/>
       </p:bgPr>
@@ -15956,10 +16106,18 @@
           <a:lstStyle/>
           <a:p>
             <a:r>
-              <a:rPr lang="en-US" b="1" dirty="0"/>
+              <a:rPr lang="en-US" b="1" dirty="0">
+                <a:solidFill>
+                  <a:srgbClr val="00B050"/>
+                </a:solidFill>
+              </a:rPr>
               <a:t>What is Quick Sort?</a:t>
             </a:r>
-            <a:endParaRPr lang="en-PH" b="1" dirty="0"/>
+            <a:endParaRPr lang="en-PH" b="1" dirty="0">
+              <a:solidFill>
+                <a:srgbClr val="00B050"/>
+              </a:solidFill>
+            </a:endParaRPr>
           </a:p>
         </p:txBody>
       </p:sp>
@@ -16727,7 +16885,7 @@
     <p:bg>
       <p:bgPr>
         <a:solidFill>
-          <a:schemeClr val="bg1"/>
+          <a:schemeClr val="tx1"/>
         </a:solidFill>
         <a:effectLst/>
       </p:bgPr>
@@ -16775,10 +16933,18 @@
           <a:lstStyle/>
           <a:p>
             <a:r>
-              <a:rPr lang="en-US" b="1" dirty="0"/>
+              <a:rPr lang="en-US" b="1" dirty="0">
+                <a:solidFill>
+                  <a:srgbClr val="00B050"/>
+                </a:solidFill>
+              </a:rPr>
               <a:t>What is Quick Sort?</a:t>
             </a:r>
-            <a:endParaRPr lang="en-PH" b="1" dirty="0"/>
+            <a:endParaRPr lang="en-PH" b="1" dirty="0">
+              <a:solidFill>
+                <a:srgbClr val="00B050"/>
+              </a:solidFill>
+            </a:endParaRPr>
           </a:p>
         </p:txBody>
       </p:sp>
@@ -17610,7 +17776,7 @@
     <p:bg>
       <p:bgPr>
         <a:solidFill>
-          <a:schemeClr val="bg1"/>
+          <a:schemeClr val="tx1"/>
         </a:solidFill>
         <a:effectLst/>
       </p:bgPr>
@@ -17658,10 +17824,18 @@
           <a:lstStyle/>
           <a:p>
             <a:r>
-              <a:rPr lang="en-US" b="1" dirty="0"/>
+              <a:rPr lang="en-US" b="1" dirty="0">
+                <a:solidFill>
+                  <a:srgbClr val="00B050"/>
+                </a:solidFill>
+              </a:rPr>
               <a:t>What is Quick Sort?</a:t>
             </a:r>
-            <a:endParaRPr lang="en-PH" b="1" dirty="0"/>
+            <a:endParaRPr lang="en-PH" b="1" dirty="0">
+              <a:solidFill>
+                <a:srgbClr val="00B050"/>
+              </a:solidFill>
+            </a:endParaRPr>
           </a:p>
         </p:txBody>
       </p:sp>
@@ -18731,15 +18905,6 @@
 </file>
 
 <file path=customXml/item2.xml><?xml version="1.0" encoding="utf-8"?>
-<?mso-contentType ?>
-<FormTemplates xmlns="http://schemas.microsoft.com/sharepoint/v3/contenttype/forms">
-  <Display>DocumentLibraryForm</Display>
-  <Edit>DocumentLibraryForm</Edit>
-  <New>DocumentLibraryForm</New>
-</FormTemplates>
-</file>
-
-<file path=customXml/item3.xml><?xml version="1.0" encoding="utf-8"?>
 <ct:contentTypeSchema xmlns:ct="http://schemas.microsoft.com/office/2006/metadata/contentType" xmlns:ma="http://schemas.microsoft.com/office/2006/metadata/properties/metaAttributes" ct:_="" ma:_="" ma:contentTypeName="Document" ma:contentTypeID="0x0101007188BDCA587B344BBA6CB1A93FAE6998" ma:contentTypeVersion="2" ma:contentTypeDescription="Create a new document." ma:contentTypeScope="" ma:versionID="7a8e4b6720badb2566a0cfeddfaf2856">
   <xsd:schema xmlns:xsd="http://www.w3.org/2001/XMLSchema" xmlns:xs="http://www.w3.org/2001/XMLSchema" xmlns:p="http://schemas.microsoft.com/office/2006/metadata/properties" xmlns:ns2="ba111d12-426d-4af0-bcb6-460e36974645" targetNamespace="http://schemas.microsoft.com/office/2006/metadata/properties" ma:root="true" ma:fieldsID="989b05398519136c88ba0a8d54e3c3da" ns2:_="">
     <xsd:import namespace="ba111d12-426d-4af0-bcb6-460e36974645"/>
@@ -18871,6 +19036,15 @@
 </ct:contentTypeSchema>
 </file>
 
+<file path=customXml/item3.xml><?xml version="1.0" encoding="utf-8"?>
+<?mso-contentType ?>
+<FormTemplates xmlns="http://schemas.microsoft.com/sharepoint/v3/contenttype/forms">
+  <Display>DocumentLibraryForm</Display>
+  <Edit>DocumentLibraryForm</Edit>
+  <New>DocumentLibraryForm</New>
+</FormTemplates>
+</file>
+
 <file path=customXml/itemProps1.xml><?xml version="1.0" encoding="utf-8"?>
 <ds:datastoreItem xmlns:ds="http://schemas.openxmlformats.org/officeDocument/2006/customXml" ds:itemID="{EA3362E2-FA54-4262-AE94-2FA98FF8142D}">
   <ds:schemaRefs>
@@ -18881,14 +19055,6 @@
 </file>
 
 <file path=customXml/itemProps2.xml><?xml version="1.0" encoding="utf-8"?>
-<ds:datastoreItem xmlns:ds="http://schemas.openxmlformats.org/officeDocument/2006/customXml" ds:itemID="{651370AF-26B9-4AFA-BA9D-5D4A7E1A6722}">
-  <ds:schemaRefs>
-    <ds:schemaRef ds:uri="http://schemas.microsoft.com/sharepoint/v3/contenttype/forms"/>
-  </ds:schemaRefs>
-</ds:datastoreItem>
-</file>
-
-<file path=customXml/itemProps3.xml><?xml version="1.0" encoding="utf-8"?>
 <ds:datastoreItem xmlns:ds="http://schemas.openxmlformats.org/officeDocument/2006/customXml" ds:itemID="{3D61E20B-708A-4719-8C02-DA91A478A7AB}">
   <ds:schemaRefs>
     <ds:schemaRef ds:uri="http://schemas.microsoft.com/office/2006/metadata/contentType"/>
@@ -18904,4 +19070,12 @@
     <ds:schemaRef ds:uri="http://schemas.microsoft.com/internal/obd"/>
   </ds:schemaRefs>
 </ds:datastoreItem>
+</file>
+
+<file path=customXml/itemProps3.xml><?xml version="1.0" encoding="utf-8"?>
+<ds:datastoreItem xmlns:ds="http://schemas.openxmlformats.org/officeDocument/2006/customXml" ds:itemID="{651370AF-26B9-4AFA-BA9D-5D4A7E1A6722}">
+  <ds:schemaRefs>
+    <ds:schemaRef ds:uri="http://schemas.microsoft.com/sharepoint/v3/contenttype/forms"/>
+  </ds:schemaRefs>
+</ds:datastoreItem>
 </file>